--- a/public/fun/cards/creative/creative-01.pptx
+++ b/public/fun/cards/creative/creative-01.pptx
@@ -3085,7 +3085,7 @@
     <p:bg>
       <p:bgPr>
         <a:solidFill>
-          <a:srgbClr val="FBF8F2"/>
+          <a:srgbClr val="FFEBF0"/>
         </a:solidFill>
         <a:effectLst/>
       </p:bgPr>
@@ -3099,192 +3099,14 @@
       <p:grpSpPr/>
       <p:sp>
         <p:nvSpPr>
-          <p:cNvPr id="2" name="Rectangle 1"/>
-          <p:cNvSpPr/>
+          <p:cNvPr id="2" name="텍스트"/>
+          <p:cNvSpPr txBox="1"/>
           <p:nvPr/>
         </p:nvSpPr>
         <p:spPr>
           <a:xfrm>
-            <a:off x="0" y="0"/>
-            <a:ext cx="165600" cy="1800000"/>
-          </a:xfrm>
-          <a:prstGeom prst="rect">
-            <a:avLst/>
-          </a:prstGeom>
-          <a:solidFill>
-            <a:srgbClr val="874587"/>
-          </a:solidFill>
-          <a:ln>
-            <a:noFill/>
-          </a:ln>
-        </p:spPr>
-        <p:txBody>
-          <a:bodyPr rtlCol="0" anchor="ctr"/>
-          <a:lstStyle/>
-          <a:p>
-            <a:pPr algn="ctr"/>
-          </a:p>
-        </p:txBody>
-      </p:sp>
-      <p:sp>
-        <p:nvSpPr>
-          <p:cNvPr id="3" name="Rectangle 2"/>
-          <p:cNvSpPr/>
-          <p:nvPr/>
-        </p:nvSpPr>
-        <p:spPr>
-          <a:xfrm>
-            <a:off x="165600" y="0"/>
-            <a:ext cx="36000" cy="1800000"/>
-          </a:xfrm>
-          <a:prstGeom prst="rect">
-            <a:avLst/>
-          </a:prstGeom>
-          <a:solidFill>
-            <a:srgbClr val="DDCBDD"/>
-          </a:solidFill>
-          <a:ln>
-            <a:noFill/>
-          </a:ln>
-        </p:spPr>
-        <p:txBody>
-          <a:bodyPr rtlCol="0" anchor="ctr"/>
-          <a:lstStyle/>
-          <a:p>
-            <a:pPr algn="ctr"/>
-          </a:p>
-        </p:txBody>
-      </p:sp>
-      <p:sp>
-        <p:nvSpPr>
-          <p:cNvPr id="4" name="Rounded Rectangle 3"/>
-          <p:cNvSpPr/>
-          <p:nvPr/>
-        </p:nvSpPr>
-        <p:spPr>
-          <a:xfrm>
-            <a:off x="2655936" y="308880"/>
-            <a:ext cx="304128" cy="207360"/>
-          </a:xfrm>
-          <a:prstGeom prst="roundRect">
-            <a:avLst>
-              <a:gd name="adj" fmla="val 16666"/>
-            </a:avLst>
-          </a:prstGeom>
-          <a:solidFill>
-            <a:srgbClr val="874587"/>
-          </a:solidFill>
-          <a:ln>
-            <a:noFill/>
-          </a:ln>
-        </p:spPr>
-        <p:txBody>
-          <a:bodyPr rtlCol="0" anchor="ctr"/>
-          <a:lstStyle/>
-          <a:p>
-            <a:pPr algn="ctr"/>
-          </a:p>
-        </p:txBody>
-      </p:sp>
-      <p:sp>
-        <p:nvSpPr>
-          <p:cNvPr id="5" name="Rounded Rectangle 4"/>
-          <p:cNvSpPr/>
-          <p:nvPr/>
-        </p:nvSpPr>
-        <p:spPr>
-          <a:xfrm>
-            <a:off x="2752704" y="260496"/>
-            <a:ext cx="110592" cy="55296"/>
-          </a:xfrm>
-          <a:prstGeom prst="roundRect">
-            <a:avLst>
-              <a:gd name="adj" fmla="val 25000"/>
-            </a:avLst>
-          </a:prstGeom>
-          <a:solidFill>
-            <a:srgbClr val="874587"/>
-          </a:solidFill>
-          <a:ln>
-            <a:noFill/>
-          </a:ln>
-        </p:spPr>
-        <p:txBody>
-          <a:bodyPr rtlCol="0" anchor="ctr"/>
-          <a:lstStyle/>
-          <a:p>
-            <a:pPr algn="ctr"/>
-          </a:p>
-        </p:txBody>
-      </p:sp>
-      <p:sp>
-        <p:nvSpPr>
-          <p:cNvPr id="6" name="Oval 5"/>
-          <p:cNvSpPr/>
-          <p:nvPr/>
-        </p:nvSpPr>
-        <p:spPr>
-          <a:xfrm>
-            <a:off x="2735424" y="339984"/>
-            <a:ext cx="145152" cy="145152"/>
-          </a:xfrm>
-          <a:prstGeom prst="ellipse">
-            <a:avLst/>
-          </a:prstGeom>
-          <a:solidFill>
-            <a:srgbClr val="DDCBDD"/>
-          </a:solidFill>
-          <a:ln>
-            <a:noFill/>
-          </a:ln>
-        </p:spPr>
-        <p:txBody>
-          <a:bodyPr rtlCol="0" anchor="ctr"/>
-          <a:lstStyle/>
-          <a:p>
-            <a:pPr algn="ctr"/>
-          </a:p>
-        </p:txBody>
-      </p:sp>
-      <p:sp>
-        <p:nvSpPr>
-          <p:cNvPr id="7" name="Oval 6"/>
-          <p:cNvSpPr/>
-          <p:nvPr/>
-        </p:nvSpPr>
-        <p:spPr>
-          <a:xfrm>
-            <a:off x="2769984" y="374544"/>
-            <a:ext cx="76032" cy="76032"/>
-          </a:xfrm>
-          <a:prstGeom prst="ellipse">
-            <a:avLst/>
-          </a:prstGeom>
-          <a:solidFill>
-            <a:srgbClr val="874587"/>
-          </a:solidFill>
-          <a:ln>
-            <a:noFill/>
-          </a:ln>
-        </p:spPr>
-        <p:txBody>
-          <a:bodyPr rtlCol="0" anchor="ctr"/>
-          <a:lstStyle/>
-          <a:p>
-            <a:pPr algn="ctr"/>
-          </a:p>
-        </p:txBody>
-      </p:sp>
-      <p:sp>
-        <p:nvSpPr>
-          <p:cNvPr id="8" name="텍스트"/>
-          <p:cNvSpPr txBox="1"/>
-          <p:nvPr/>
-        </p:nvSpPr>
-        <p:spPr>
-          <a:xfrm>
-            <a:off x="396000" y="223200"/>
-            <a:ext cx="2016000" cy="108000"/>
+            <a:off x="252000" y="223200"/>
+            <a:ext cx="2016000" cy="133351"/>
           </a:xfrm>
           <a:prstGeom prst="rect">
             <a:avLst/>
@@ -3299,13 +3121,13 @@
           <a:p>
             <a:pPr algn="l">
               <a:lnSpc>
-                <a:spcPts val="1087"/>
+                <a:spcPts val="1015"/>
               </a:lnSpc>
             </a:pPr>
             <a:r>
-              <a:rPr sz="750" b="1" spc="150">
+              <a:rPr sz="700" b="1" spc="200">
                 <a:solidFill>
-                  <a:srgbClr val="657469"/>
+                  <a:srgbClr val="6C233A"/>
                 </a:solidFill>
                 <a:latin typeface="맑은 고딕"/>
                 <a:ea typeface="맑은 고딕"/>
@@ -3317,14 +3139,43 @@
       </p:sp>
       <p:sp>
         <p:nvSpPr>
-          <p:cNvPr id="9" name="텍스트"/>
+          <p:cNvPr id="3" name="Oval 2"/>
+          <p:cNvSpPr/>
+          <p:nvPr/>
+        </p:nvSpPr>
+        <p:spPr>
+          <a:xfrm>
+            <a:off x="2955600" y="241200"/>
+            <a:ext cx="64800" cy="64800"/>
+          </a:xfrm>
+          <a:prstGeom prst="ellipse">
+            <a:avLst/>
+          </a:prstGeom>
+          <a:solidFill>
+            <a:srgbClr val="FF3B6B"/>
+          </a:solidFill>
+          <a:ln>
+            <a:noFill/>
+          </a:ln>
+        </p:spPr>
+        <p:txBody>
+          <a:bodyPr rtlCol="0" anchor="ctr"/>
+          <a:lstStyle/>
+          <a:p>
+            <a:pPr algn="ctr"/>
+          </a:p>
+        </p:txBody>
+      </p:sp>
+      <p:sp>
+        <p:nvSpPr>
+          <p:cNvPr id="4" name="텍스트"/>
           <p:cNvSpPr txBox="1"/>
           <p:nvPr/>
         </p:nvSpPr>
         <p:spPr>
           <a:xfrm>
-            <a:off x="396000" y="540000"/>
-            <a:ext cx="2160000" cy="313692"/>
+            <a:off x="252000" y="676800"/>
+            <a:ext cx="2520000" cy="360000"/>
           </a:xfrm>
           <a:prstGeom prst="rect">
             <a:avLst/>
@@ -3339,16 +3190,16 @@
           <a:p>
             <a:pPr algn="l">
               <a:lnSpc>
-                <a:spcPts val="2755"/>
+                <a:spcPts val="3190"/>
               </a:lnSpc>
             </a:pPr>
             <a:r>
-              <a:rPr sz="1900" b="1" spc="50">
+              <a:rPr sz="2200" b="1">
                 <a:solidFill>
-                  <a:srgbClr val="1C3629"/>
+                  <a:srgbClr val="12151C"/>
                 </a:solidFill>
-                <a:latin typeface="바탕"/>
-                <a:ea typeface="바탕"/>
+                <a:latin typeface="맑은 고딕"/>
+                <a:ea typeface="맑은 고딕"/>
               </a:rPr>
               <a:t>김하늘</a:t>
             </a:r>
@@ -3357,14 +3208,14 @@
       </p:sp>
       <p:sp>
         <p:nvSpPr>
-          <p:cNvPr id="10" name="텍스트"/>
+          <p:cNvPr id="5" name="텍스트"/>
           <p:cNvSpPr txBox="1"/>
           <p:nvPr/>
         </p:nvSpPr>
         <p:spPr>
           <a:xfrm>
-            <a:off x="396000" y="835200"/>
-            <a:ext cx="2160000" cy="129600"/>
+            <a:off x="252000" y="1080000"/>
+            <a:ext cx="2520000" cy="171451"/>
           </a:xfrm>
           <a:prstGeom prst="rect">
             <a:avLst/>
@@ -3379,13 +3230,13 @@
           <a:p>
             <a:pPr algn="l">
               <a:lnSpc>
-                <a:spcPts val="1232"/>
+                <a:spcPts val="1305"/>
               </a:lnSpc>
             </a:pPr>
             <a:r>
-              <a:rPr sz="850" b="1">
+              <a:rPr sz="900" b="0">
                 <a:solidFill>
-                  <a:srgbClr val="874587"/>
+                  <a:srgbClr val="6C233A"/>
                 </a:solidFill>
                 <a:latin typeface="맑은 고딕"/>
                 <a:ea typeface="맑은 고딕"/>
@@ -3395,45 +3246,37 @@
           </a:p>
         </p:txBody>
       </p:sp>
-      <p:sp>
-        <p:nvSpPr>
-          <p:cNvPr id="11" name="Rectangle 10"/>
-          <p:cNvSpPr/>
+      <p:cxnSp>
+        <p:nvCxnSpPr>
+          <p:cNvPr id="6" name="Connector 5"/>
+          <p:cNvCxnSpPr/>
           <p:nvPr/>
-        </p:nvSpPr>
+        </p:nvCxnSpPr>
         <p:spPr>
           <a:xfrm>
-            <a:off x="396000" y="1051200"/>
-            <a:ext cx="230400" cy="14400"/>
+            <a:off x="252000" y="1339200"/>
+            <a:ext cx="2736000" cy="0"/>
           </a:xfrm>
-          <a:prstGeom prst="rect">
+          <a:prstGeom prst="line">
             <a:avLst/>
           </a:prstGeom>
-          <a:solidFill>
-            <a:srgbClr val="874587"/>
-          </a:solidFill>
-          <a:ln>
-            <a:noFill/>
+          <a:ln w="5760">
+            <a:solidFill>
+              <a:srgbClr val="FFC8D6"/>
+            </a:solidFill>
           </a:ln>
         </p:spPr>
-        <p:txBody>
-          <a:bodyPr rtlCol="0" anchor="ctr"/>
-          <a:lstStyle/>
-          <a:p>
-            <a:pPr algn="ctr"/>
-          </a:p>
-        </p:txBody>
-      </p:sp>
-      <p:sp>
-        <p:nvSpPr>
-          <p:cNvPr id="12" name="텍스트"/>
+      </p:cxnSp>
+      <p:sp>
+        <p:nvSpPr>
+          <p:cNvPr id="7" name="텍스트"/>
           <p:cNvSpPr txBox="1"/>
           <p:nvPr/>
         </p:nvSpPr>
         <p:spPr>
           <a:xfrm>
-            <a:off x="396000" y="1188000"/>
-            <a:ext cx="122400" cy="168911"/>
+            <a:off x="252000" y="1411200"/>
+            <a:ext cx="792000" cy="129541"/>
           </a:xfrm>
           <a:prstGeom prst="rect">
             <a:avLst/>
@@ -3448,32 +3291,32 @@
           <a:p>
             <a:pPr algn="l">
               <a:lnSpc>
-                <a:spcPts val="1015"/>
+                <a:spcPts val="986"/>
               </a:lnSpc>
             </a:pPr>
             <a:r>
-              <a:rPr sz="700" b="1">
+              <a:rPr sz="680" b="0">
                 <a:solidFill>
-                  <a:srgbClr val="874587"/>
+                  <a:srgbClr val="12151C"/>
                 </a:solidFill>
                 <a:latin typeface="맑은 고딕"/>
                 <a:ea typeface="맑은 고딕"/>
               </a:rPr>
-              <a:t>T</a:t>
-            </a:r>
-          </a:p>
-        </p:txBody>
-      </p:sp>
-      <p:sp>
-        <p:nvSpPr>
-          <p:cNvPr id="13" name="텍스트"/>
+              <a:t>010-1234-5678</a:t>
+            </a:r>
+          </a:p>
+        </p:txBody>
+      </p:sp>
+      <p:sp>
+        <p:nvSpPr>
+          <p:cNvPr id="8" name="텍스트"/>
           <p:cNvSpPr txBox="1"/>
           <p:nvPr/>
         </p:nvSpPr>
         <p:spPr>
           <a:xfrm>
-            <a:off x="540000" y="1188000"/>
-            <a:ext cx="1872000" cy="168911"/>
+            <a:off x="1080000" y="1411200"/>
+            <a:ext cx="900000" cy="129541"/>
           </a:xfrm>
           <a:prstGeom prst="rect">
             <a:avLst/>
@@ -3488,32 +3331,32 @@
           <a:p>
             <a:pPr algn="l">
               <a:lnSpc>
-                <a:spcPts val="1015"/>
+                <a:spcPts val="986"/>
               </a:lnSpc>
             </a:pPr>
             <a:r>
-              <a:rPr sz="700" b="0">
+              <a:rPr sz="680" b="0">
                 <a:solidFill>
-                  <a:srgbClr val="1C3629"/>
+                  <a:srgbClr val="12151C"/>
                 </a:solidFill>
                 <a:latin typeface="맑은 고딕"/>
                 <a:ea typeface="맑은 고딕"/>
               </a:rPr>
-              <a:t>010-1234-5678</a:t>
-            </a:r>
-          </a:p>
-        </p:txBody>
-      </p:sp>
-      <p:sp>
-        <p:nvSpPr>
-          <p:cNvPr id="14" name="텍스트"/>
+              <a:t>name@example.com</a:t>
+            </a:r>
+          </a:p>
+        </p:txBody>
+      </p:sp>
+      <p:sp>
+        <p:nvSpPr>
+          <p:cNvPr id="9" name="텍스트"/>
           <p:cNvSpPr txBox="1"/>
           <p:nvPr/>
         </p:nvSpPr>
         <p:spPr>
           <a:xfrm>
-            <a:off x="396000" y="1356911"/>
-            <a:ext cx="122400" cy="168911"/>
+            <a:off x="2052000" y="1411200"/>
+            <a:ext cx="972000" cy="129541"/>
           </a:xfrm>
           <a:prstGeom prst="rect">
             <a:avLst/>
@@ -3528,32 +3371,32 @@
           <a:p>
             <a:pPr algn="l">
               <a:lnSpc>
-                <a:spcPts val="1015"/>
+                <a:spcPts val="986"/>
               </a:lnSpc>
             </a:pPr>
             <a:r>
-              <a:rPr sz="700" b="1">
+              <a:rPr sz="680" b="0">
                 <a:solidFill>
-                  <a:srgbClr val="874587"/>
+                  <a:srgbClr val="12151C"/>
                 </a:solidFill>
                 <a:latin typeface="맑은 고딕"/>
                 <a:ea typeface="맑은 고딕"/>
               </a:rPr>
-              <a:t>E</a:t>
-            </a:r>
-          </a:p>
-        </p:txBody>
-      </p:sp>
-      <p:sp>
-        <p:nvSpPr>
-          <p:cNvPr id="15" name="텍스트"/>
+              <a:t>주소를 입력해 주세요</a:t>
+            </a:r>
+          </a:p>
+        </p:txBody>
+      </p:sp>
+      <p:sp>
+        <p:nvSpPr>
+          <p:cNvPr id="10" name="텍스트"/>
           <p:cNvSpPr txBox="1"/>
           <p:nvPr/>
         </p:nvSpPr>
         <p:spPr>
           <a:xfrm>
-            <a:off x="540000" y="1356911"/>
-            <a:ext cx="1872000" cy="168911"/>
+            <a:off x="252000" y="1526400"/>
+            <a:ext cx="216000" cy="95251"/>
           </a:xfrm>
           <a:prstGeom prst="rect">
             <a:avLst/>
@@ -3568,32 +3411,32 @@
           <a:p>
             <a:pPr algn="l">
               <a:lnSpc>
-                <a:spcPts val="1015"/>
+                <a:spcPts val="725"/>
               </a:lnSpc>
             </a:pPr>
             <a:r>
-              <a:rPr sz="700" b="0">
+              <a:rPr sz="500" b="1" spc="120">
                 <a:solidFill>
-                  <a:srgbClr val="1C3629"/>
+                  <a:srgbClr val="6C233A"/>
                 </a:solidFill>
                 <a:latin typeface="맑은 고딕"/>
                 <a:ea typeface="맑은 고딕"/>
               </a:rPr>
-              <a:t>name@example.com</a:t>
-            </a:r>
-          </a:p>
-        </p:txBody>
-      </p:sp>
-      <p:sp>
-        <p:nvSpPr>
-          <p:cNvPr id="16" name="텍스트"/>
+              <a:t>TEL</a:t>
+            </a:r>
+          </a:p>
+        </p:txBody>
+      </p:sp>
+      <p:sp>
+        <p:nvSpPr>
+          <p:cNvPr id="11" name="텍스트"/>
           <p:cNvSpPr txBox="1"/>
           <p:nvPr/>
         </p:nvSpPr>
         <p:spPr>
           <a:xfrm>
-            <a:off x="396000" y="1525822"/>
-            <a:ext cx="122400" cy="168911"/>
+            <a:off x="1080000" y="1526400"/>
+            <a:ext cx="216000" cy="95251"/>
           </a:xfrm>
           <a:prstGeom prst="rect">
             <a:avLst/>
@@ -3608,32 +3451,32 @@
           <a:p>
             <a:pPr algn="l">
               <a:lnSpc>
-                <a:spcPts val="1015"/>
+                <a:spcPts val="725"/>
               </a:lnSpc>
             </a:pPr>
             <a:r>
-              <a:rPr sz="700" b="1">
+              <a:rPr sz="500" b="1" spc="120">
                 <a:solidFill>
-                  <a:srgbClr val="874587"/>
+                  <a:srgbClr val="6C233A"/>
                 </a:solidFill>
                 <a:latin typeface="맑은 고딕"/>
                 <a:ea typeface="맑은 고딕"/>
               </a:rPr>
-              <a:t>A</a:t>
-            </a:r>
-          </a:p>
-        </p:txBody>
-      </p:sp>
-      <p:sp>
-        <p:nvSpPr>
-          <p:cNvPr id="17" name="텍스트"/>
+              <a:t>MAIL</a:t>
+            </a:r>
+          </a:p>
+        </p:txBody>
+      </p:sp>
+      <p:sp>
+        <p:nvSpPr>
+          <p:cNvPr id="12" name="텍스트"/>
           <p:cNvSpPr txBox="1"/>
           <p:nvPr/>
         </p:nvSpPr>
         <p:spPr>
           <a:xfrm>
-            <a:off x="540000" y="1525822"/>
-            <a:ext cx="1872000" cy="168911"/>
+            <a:off x="2052000" y="1526400"/>
+            <a:ext cx="216000" cy="95251"/>
           </a:xfrm>
           <a:prstGeom prst="rect">
             <a:avLst/>
@@ -3648,18 +3491,18 @@
           <a:p>
             <a:pPr algn="l">
               <a:lnSpc>
-                <a:spcPts val="1015"/>
+                <a:spcPts val="725"/>
               </a:lnSpc>
             </a:pPr>
             <a:r>
-              <a:rPr sz="700" b="0">
+              <a:rPr sz="500" b="1" spc="120">
                 <a:solidFill>
-                  <a:srgbClr val="1C3629"/>
+                  <a:srgbClr val="6C233A"/>
                 </a:solidFill>
                 <a:latin typeface="맑은 고딕"/>
                 <a:ea typeface="맑은 고딕"/>
               </a:rPr>
-              <a:t>주소를 입력해 주세요</a:t>
+              <a:t>ADDR</a:t>
             </a:r>
           </a:p>
         </p:txBody>
@@ -3678,7 +3521,7 @@
     <p:bg>
       <p:bgPr>
         <a:solidFill>
-          <a:srgbClr val="1C3629"/>
+          <a:srgbClr val="0E1116"/>
         </a:solidFill>
         <a:effectLst/>
       </p:bgPr>
@@ -3698,14 +3541,14 @@
         </p:nvSpPr>
         <p:spPr>
           <a:xfrm>
-            <a:off x="0" y="0"/>
-            <a:ext cx="64800" cy="1800000"/>
+            <a:off x="252000" y="540000"/>
+            <a:ext cx="28800" cy="720000"/>
           </a:xfrm>
           <a:prstGeom prst="rect">
             <a:avLst/>
           </a:prstGeom>
           <a:solidFill>
-            <a:srgbClr val="709784"/>
+            <a:srgbClr val="FF3B6B"/>
           </a:solidFill>
           <a:ln>
             <a:noFill/>
@@ -3727,8 +3570,8 @@
         </p:nvSpPr>
         <p:spPr>
           <a:xfrm>
-            <a:off x="252000" y="432000"/>
-            <a:ext cx="2016000" cy="252000"/>
+            <a:off x="424800" y="612000"/>
+            <a:ext cx="2160000" cy="648000"/>
           </a:xfrm>
           <a:prstGeom prst="rect">
             <a:avLst/>
@@ -3743,18 +3586,35 @@
           <a:p>
             <a:pPr algn="l">
               <a:lnSpc>
-                <a:spcPts val="2465"/>
+                <a:spcPts val="1812"/>
               </a:lnSpc>
             </a:pPr>
             <a:r>
-              <a:rPr sz="1700" b="1">
+              <a:rPr sz="1250" b="1">
                 <a:solidFill>
                   <a:srgbClr val="FFFFFF"/>
                 </a:solidFill>
-                <a:latin typeface="바탕"/>
-                <a:ea typeface="바탕"/>
+                <a:latin typeface="맑은 고딕"/>
+                <a:ea typeface="맑은 고딕"/>
               </a:rPr>
-              <a:t>스튜디오 이름</a:t>
+              <a:t>당신의 이야기를</a:t>
+            </a:r>
+          </a:p>
+          <a:p>
+            <a:pPr algn="l">
+              <a:lnSpc>
+                <a:spcPts val="1812"/>
+              </a:lnSpc>
+            </a:pPr>
+            <a:r>
+              <a:rPr sz="1250" b="1">
+                <a:solidFill>
+                  <a:srgbClr val="FFFFFF"/>
+                </a:solidFill>
+                <a:latin typeface="맑은 고딕"/>
+                <a:ea typeface="맑은 고딕"/>
+              </a:rPr>
+              <a:t>장면으로 옮깁니다</a:t>
             </a:r>
           </a:p>
         </p:txBody>
@@ -3767,8 +3627,8 @@
         </p:nvSpPr>
         <p:spPr>
           <a:xfrm>
-            <a:off x="252000" y="878400"/>
-            <a:ext cx="2016000" cy="540000"/>
+            <a:off x="424800" y="1512000"/>
+            <a:ext cx="1800000" cy="123826"/>
           </a:xfrm>
           <a:prstGeom prst="rect">
             <a:avLst/>
@@ -3783,238 +3643,19 @@
           <a:p>
             <a:pPr algn="l">
               <a:lnSpc>
-                <a:spcPts val="1232"/>
+                <a:spcPts val="942"/>
               </a:lnSpc>
             </a:pPr>
             <a:r>
-              <a:rPr sz="850" b="0">
+              <a:rPr sz="650" b="1" spc="200">
                 <a:solidFill>
-                  <a:srgbClr val="B0B9B4"/>
+                  <a:srgbClr val="A3A9B5"/>
                 </a:solidFill>
                 <a:latin typeface="맑은 고딕"/>
                 <a:ea typeface="맑은 고딕"/>
               </a:rPr>
-              <a:t>당신의 이야기를 장면으로 옮깁니다</a:t>
-            </a:r>
-          </a:p>
-        </p:txBody>
-      </p:sp>
-      <p:sp>
-        <p:nvSpPr>
-          <p:cNvPr id="5" name="Rectangle 4"/>
-          <p:cNvSpPr/>
-          <p:nvPr/>
-        </p:nvSpPr>
-        <p:spPr>
-          <a:xfrm>
-            <a:off x="2520000" y="1080000"/>
-            <a:ext cx="504000" cy="504000"/>
-          </a:xfrm>
-          <a:prstGeom prst="rect">
-            <a:avLst/>
-          </a:prstGeom>
-          <a:noFill/>
-          <a:ln w="9000">
-            <a:solidFill>
-              <a:srgbClr val="709784"/>
-            </a:solidFill>
-            <a:prstDash val="dash"/>
-          </a:ln>
-        </p:spPr>
-        <p:txBody>
-          <a:bodyPr rtlCol="0" anchor="ctr"/>
-          <a:lstStyle/>
-          <a:p>
-            <a:pPr algn="ctr"/>
-          </a:p>
-        </p:txBody>
-      </p:sp>
-      <p:sp>
-        <p:nvSpPr>
-          <p:cNvPr id="6" name="텍스트"/>
-          <p:cNvSpPr txBox="1"/>
-          <p:nvPr/>
-        </p:nvSpPr>
-        <p:spPr>
-          <a:xfrm>
-            <a:off x="2520000" y="1080000"/>
-            <a:ext cx="504000" cy="504000"/>
-          </a:xfrm>
-          <a:prstGeom prst="rect">
-            <a:avLst/>
-          </a:prstGeom>
-          <a:noFill/>
-        </p:spPr>
-        <p:txBody>
-          <a:bodyPr wrap="square" lIns="0" rIns="0" tIns="0" bIns="0" anchor="ctr">
-            <a:spAutoFit/>
-          </a:bodyPr>
-          <a:lstStyle/>
-          <a:p>
-            <a:pPr algn="ctr">
-              <a:lnSpc>
-                <a:spcPts val="1305"/>
-              </a:lnSpc>
-            </a:pPr>
-            <a:r>
-              <a:rPr sz="900" b="1">
-                <a:solidFill>
-                  <a:srgbClr val="B0B9B4"/>
-                </a:solidFill>
-                <a:latin typeface="맑은 고딕"/>
-                <a:ea typeface="맑은 고딕"/>
-              </a:rPr>
-              <a:t>QR</a:t>
-            </a:r>
-          </a:p>
-        </p:txBody>
-      </p:sp>
-      <p:sp>
-        <p:nvSpPr>
-          <p:cNvPr id="7" name="Rectangle 6"/>
-          <p:cNvSpPr/>
-          <p:nvPr/>
-        </p:nvSpPr>
-        <p:spPr>
-          <a:xfrm>
-            <a:off x="252000" y="763200"/>
-            <a:ext cx="201600" cy="14400"/>
-          </a:xfrm>
-          <a:prstGeom prst="rect">
-            <a:avLst/>
-          </a:prstGeom>
-          <a:solidFill>
-            <a:srgbClr val="709784"/>
-          </a:solidFill>
-          <a:ln>
-            <a:noFill/>
-          </a:ln>
-        </p:spPr>
-        <p:txBody>
-          <a:bodyPr rtlCol="0" anchor="ctr"/>
-          <a:lstStyle/>
-          <a:p>
-            <a:pPr algn="ctr"/>
-          </a:p>
-        </p:txBody>
-      </p:sp>
-      <p:sp>
-        <p:nvSpPr>
-          <p:cNvPr id="8" name="Rounded Rectangle 7"/>
-          <p:cNvSpPr/>
-          <p:nvPr/>
-        </p:nvSpPr>
-        <p:spPr>
-          <a:xfrm>
-            <a:off x="2629440" y="367200"/>
-            <a:ext cx="285120" cy="194400"/>
-          </a:xfrm>
-          <a:prstGeom prst="roundRect">
-            <a:avLst>
-              <a:gd name="adj" fmla="val 16666"/>
-            </a:avLst>
-          </a:prstGeom>
-          <a:solidFill>
-            <a:srgbClr val="709784"/>
-          </a:solidFill>
-          <a:ln>
-            <a:noFill/>
-          </a:ln>
-        </p:spPr>
-        <p:txBody>
-          <a:bodyPr rtlCol="0" anchor="ctr"/>
-          <a:lstStyle/>
-          <a:p>
-            <a:pPr algn="ctr"/>
-          </a:p>
-        </p:txBody>
-      </p:sp>
-      <p:sp>
-        <p:nvSpPr>
-          <p:cNvPr id="9" name="Rounded Rectangle 8"/>
-          <p:cNvSpPr/>
-          <p:nvPr/>
-        </p:nvSpPr>
-        <p:spPr>
-          <a:xfrm>
-            <a:off x="2720160" y="321840"/>
-            <a:ext cx="103680" cy="51840"/>
-          </a:xfrm>
-          <a:prstGeom prst="roundRect">
-            <a:avLst>
-              <a:gd name="adj" fmla="val 25000"/>
-            </a:avLst>
-          </a:prstGeom>
-          <a:solidFill>
-            <a:srgbClr val="709784"/>
-          </a:solidFill>
-          <a:ln>
-            <a:noFill/>
-          </a:ln>
-        </p:spPr>
-        <p:txBody>
-          <a:bodyPr rtlCol="0" anchor="ctr"/>
-          <a:lstStyle/>
-          <a:p>
-            <a:pPr algn="ctr"/>
-          </a:p>
-        </p:txBody>
-      </p:sp>
-      <p:sp>
-        <p:nvSpPr>
-          <p:cNvPr id="10" name="Oval 9"/>
-          <p:cNvSpPr/>
-          <p:nvPr/>
-        </p:nvSpPr>
-        <p:spPr>
-          <a:xfrm>
-            <a:off x="2703960" y="396360"/>
-            <a:ext cx="136080" cy="136080"/>
-          </a:xfrm>
-          <a:prstGeom prst="ellipse">
-            <a:avLst/>
-          </a:prstGeom>
-          <a:solidFill>
-            <a:srgbClr val="40564B"/>
-          </a:solidFill>
-          <a:ln>
-            <a:noFill/>
-          </a:ln>
-        </p:spPr>
-        <p:txBody>
-          <a:bodyPr rtlCol="0" anchor="ctr"/>
-          <a:lstStyle/>
-          <a:p>
-            <a:pPr algn="ctr"/>
-          </a:p>
-        </p:txBody>
-      </p:sp>
-      <p:sp>
-        <p:nvSpPr>
-          <p:cNvPr id="11" name="Oval 10"/>
-          <p:cNvSpPr/>
-          <p:nvPr/>
-        </p:nvSpPr>
-        <p:spPr>
-          <a:xfrm>
-            <a:off x="2736360" y="428760"/>
-            <a:ext cx="71280" cy="71280"/>
-          </a:xfrm>
-          <a:prstGeom prst="ellipse">
-            <a:avLst/>
-          </a:prstGeom>
-          <a:solidFill>
-            <a:srgbClr val="709784"/>
-          </a:solidFill>
-          <a:ln>
-            <a:noFill/>
-          </a:ln>
-        </p:spPr>
-        <p:txBody>
-          <a:bodyPr rtlCol="0" anchor="ctr"/>
-          <a:lstStyle/>
-          <a:p>
-            <a:pPr algn="ctr"/>
+              <a:t>스튜디오 이름</a:t>
+            </a:r>
           </a:p>
         </p:txBody>
       </p:sp>

--- a/public/fun/cards/creative/creative-01.pptx
+++ b/public/fun/cards/creative/creative-01.pptx
@@ -3099,56 +3099,45 @@
       <p:grpSpPr/>
       <p:sp>
         <p:nvSpPr>
-          <p:cNvPr id="2" name="텍스트"/>
-          <p:cNvSpPr txBox="1"/>
+          <p:cNvPr id="2" name="Rectangle 1"/>
+          <p:cNvSpPr/>
           <p:nvPr/>
         </p:nvSpPr>
         <p:spPr>
           <a:xfrm>
-            <a:off x="252000" y="223200"/>
-            <a:ext cx="2016000" cy="133351"/>
+            <a:off x="93600" y="93600"/>
+            <a:ext cx="3052800" cy="1612800"/>
           </a:xfrm>
           <a:prstGeom prst="rect">
             <a:avLst/>
           </a:prstGeom>
           <a:noFill/>
-        </p:spPr>
-        <p:txBody>
-          <a:bodyPr wrap="square" lIns="0" rIns="0" tIns="0" bIns="0" anchor="t">
-            <a:spAutoFit/>
-          </a:bodyPr>
-          <a:lstStyle/>
-          <a:p>
-            <a:pPr algn="l">
-              <a:lnSpc>
-                <a:spcPts val="1015"/>
-              </a:lnSpc>
-            </a:pPr>
-            <a:r>
-              <a:rPr sz="700" b="1" spc="200">
-                <a:solidFill>
-                  <a:srgbClr val="6C233A"/>
-                </a:solidFill>
-                <a:latin typeface="맑은 고딕"/>
-                <a:ea typeface="맑은 고딕"/>
-              </a:rPr>
-              <a:t>스튜디오 이름</a:t>
-            </a:r>
-          </a:p>
-        </p:txBody>
-      </p:sp>
-      <p:sp>
-        <p:nvSpPr>
-          <p:cNvPr id="3" name="Oval 2"/>
+          <a:ln w="3600">
+            <a:solidFill>
+              <a:srgbClr val="FFC8D6"/>
+            </a:solidFill>
+          </a:ln>
+        </p:spPr>
+        <p:txBody>
+          <a:bodyPr rtlCol="0" anchor="ctr"/>
+          <a:lstStyle/>
+          <a:p>
+            <a:pPr algn="ctr"/>
+          </a:p>
+        </p:txBody>
+      </p:sp>
+      <p:sp>
+        <p:nvSpPr>
+          <p:cNvPr id="3" name="Rectangle 2"/>
           <p:cNvSpPr/>
           <p:nvPr/>
         </p:nvSpPr>
         <p:spPr>
           <a:xfrm>
-            <a:off x="2955600" y="241200"/>
-            <a:ext cx="64800" cy="64800"/>
-          </a:xfrm>
-          <a:prstGeom prst="ellipse">
+            <a:off x="252000" y="252000"/>
+            <a:ext cx="79200" cy="79200"/>
+          </a:xfrm>
+          <a:prstGeom prst="rect">
             <a:avLst/>
           </a:prstGeom>
           <a:solidFill>
@@ -3174,8 +3163,8 @@
         </p:nvSpPr>
         <p:spPr>
           <a:xfrm>
-            <a:off x="252000" y="676800"/>
-            <a:ext cx="2520000" cy="360000"/>
+            <a:off x="396000" y="259200"/>
+            <a:ext cx="1512000" cy="123826"/>
           </a:xfrm>
           <a:prstGeom prst="rect">
             <a:avLst/>
@@ -3190,11 +3179,72 @@
           <a:p>
             <a:pPr algn="l">
               <a:lnSpc>
-                <a:spcPts val="3190"/>
+                <a:spcPts val="942"/>
               </a:lnSpc>
             </a:pPr>
             <a:r>
-              <a:rPr sz="2200" b="1">
+              <a:rPr sz="650" b="1" spc="220">
+                <a:solidFill>
+                  <a:srgbClr val="6C233A"/>
+                </a:solidFill>
+                <a:latin typeface="맑은 고딕"/>
+                <a:ea typeface="맑은 고딕"/>
+              </a:rPr>
+              <a:t>스튜디오 이름</a:t>
+            </a:r>
+          </a:p>
+        </p:txBody>
+      </p:sp>
+      <p:cxnSp>
+        <p:nvCxnSpPr>
+          <p:cNvPr id="5" name="Connector 4"/>
+          <p:cNvCxnSpPr/>
+          <p:nvPr/>
+        </p:nvCxnSpPr>
+        <p:spPr>
+          <a:xfrm>
+            <a:off x="252000" y="446400"/>
+            <a:ext cx="2736000" cy="0"/>
+          </a:xfrm>
+          <a:prstGeom prst="line">
+            <a:avLst/>
+          </a:prstGeom>
+          <a:ln w="3600">
+            <a:solidFill>
+              <a:srgbClr val="FFC8D6"/>
+            </a:solidFill>
+          </a:ln>
+        </p:spPr>
+      </p:cxnSp>
+      <p:sp>
+        <p:nvSpPr>
+          <p:cNvPr id="6" name="텍스트"/>
+          <p:cNvSpPr txBox="1"/>
+          <p:nvPr/>
+        </p:nvSpPr>
+        <p:spPr>
+          <a:xfrm>
+            <a:off x="252000" y="964800"/>
+            <a:ext cx="1800000" cy="237600"/>
+          </a:xfrm>
+          <a:prstGeom prst="rect">
+            <a:avLst/>
+          </a:prstGeom>
+          <a:noFill/>
+        </p:spPr>
+        <p:txBody>
+          <a:bodyPr wrap="square" lIns="0" rIns="0" tIns="0" bIns="0" anchor="t">
+            <a:spAutoFit/>
+          </a:bodyPr>
+          <a:lstStyle/>
+          <a:p>
+            <a:pPr algn="l">
+              <a:lnSpc>
+                <a:spcPts val="1957"/>
+              </a:lnSpc>
+            </a:pPr>
+            <a:r>
+              <a:rPr sz="1350" b="1" spc="120">
                 <a:solidFill>
                   <a:srgbClr val="12151C"/>
                 </a:solidFill>
@@ -3208,14 +3258,14 @@
       </p:sp>
       <p:sp>
         <p:nvSpPr>
-          <p:cNvPr id="5" name="텍스트"/>
+          <p:cNvPr id="7" name="텍스트"/>
           <p:cNvSpPr txBox="1"/>
           <p:nvPr/>
         </p:nvSpPr>
         <p:spPr>
           <a:xfrm>
-            <a:off x="252000" y="1080000"/>
-            <a:ext cx="2520000" cy="171451"/>
+            <a:off x="252000" y="1216800"/>
+            <a:ext cx="1800000" cy="133351"/>
           </a:xfrm>
           <a:prstGeom prst="rect">
             <a:avLst/>
@@ -3230,11 +3280,11 @@
           <a:p>
             <a:pPr algn="l">
               <a:lnSpc>
-                <a:spcPts val="1305"/>
+                <a:spcPts val="1015"/>
               </a:lnSpc>
             </a:pPr>
             <a:r>
-              <a:rPr sz="900" b="0">
+              <a:rPr sz="700" b="0" spc="60">
                 <a:solidFill>
                   <a:srgbClr val="6C233A"/>
                 </a:solidFill>
@@ -3248,19 +3298,19 @@
       </p:sp>
       <p:cxnSp>
         <p:nvCxnSpPr>
-          <p:cNvPr id="6" name="Connector 5"/>
+          <p:cNvPr id="8" name="Connector 7"/>
           <p:cNvCxnSpPr/>
           <p:nvPr/>
         </p:nvCxnSpPr>
         <p:spPr>
           <a:xfrm>
-            <a:off x="252000" y="1339200"/>
-            <a:ext cx="2736000" cy="0"/>
+            <a:off x="1872000" y="943200"/>
+            <a:ext cx="0" cy="604800"/>
           </a:xfrm>
           <a:prstGeom prst="line">
             <a:avLst/>
           </a:prstGeom>
-          <a:ln w="5760">
+          <a:ln w="3600">
             <a:solidFill>
               <a:srgbClr val="FFC8D6"/>
             </a:solidFill>
@@ -3269,14 +3319,14 @@
       </p:cxnSp>
       <p:sp>
         <p:nvSpPr>
-          <p:cNvPr id="7" name="텍스트"/>
+          <p:cNvPr id="9" name="텍스트"/>
           <p:cNvSpPr txBox="1"/>
           <p:nvPr/>
         </p:nvSpPr>
         <p:spPr>
           <a:xfrm>
-            <a:off x="252000" y="1411200"/>
-            <a:ext cx="792000" cy="129541"/>
+            <a:off x="2016000" y="1033200"/>
+            <a:ext cx="302400" cy="91441"/>
           </a:xfrm>
           <a:prstGeom prst="rect">
             <a:avLst/>
@@ -3291,11 +3341,51 @@
           <a:p>
             <a:pPr algn="l">
               <a:lnSpc>
-                <a:spcPts val="986"/>
+                <a:spcPts val="696"/>
               </a:lnSpc>
             </a:pPr>
             <a:r>
-              <a:rPr sz="680" b="0">
+              <a:rPr sz="480" b="1" spc="140">
+                <a:solidFill>
+                  <a:srgbClr val="6C233A"/>
+                </a:solidFill>
+                <a:latin typeface="맑은 고딕"/>
+                <a:ea typeface="맑은 고딕"/>
+              </a:rPr>
+              <a:t>TEL</a:t>
+            </a:r>
+          </a:p>
+        </p:txBody>
+      </p:sp>
+      <p:sp>
+        <p:nvSpPr>
+          <p:cNvPr id="10" name="텍스트"/>
+          <p:cNvSpPr txBox="1"/>
+          <p:nvPr/>
+        </p:nvSpPr>
+        <p:spPr>
+          <a:xfrm>
+            <a:off x="2318400" y="1022400"/>
+            <a:ext cx="972000" cy="123826"/>
+          </a:xfrm>
+          <a:prstGeom prst="rect">
+            <a:avLst/>
+          </a:prstGeom>
+          <a:noFill/>
+        </p:spPr>
+        <p:txBody>
+          <a:bodyPr wrap="square" lIns="0" rIns="0" tIns="0" bIns="0" anchor="t">
+            <a:spAutoFit/>
+          </a:bodyPr>
+          <a:lstStyle/>
+          <a:p>
+            <a:pPr algn="l">
+              <a:lnSpc>
+                <a:spcPts val="942"/>
+              </a:lnSpc>
+            </a:pPr>
+            <a:r>
+              <a:rPr sz="650" b="0">
                 <a:solidFill>
                   <a:srgbClr val="12151C"/>
                 </a:solidFill>
@@ -3309,14 +3399,14 @@
       </p:sp>
       <p:sp>
         <p:nvSpPr>
-          <p:cNvPr id="8" name="텍스트"/>
+          <p:cNvPr id="11" name="텍스트"/>
           <p:cNvSpPr txBox="1"/>
           <p:nvPr/>
         </p:nvSpPr>
         <p:spPr>
           <a:xfrm>
-            <a:off x="1080000" y="1411200"/>
-            <a:ext cx="900000" cy="129541"/>
+            <a:off x="2016000" y="1177200"/>
+            <a:ext cx="302400" cy="91441"/>
           </a:xfrm>
           <a:prstGeom prst="rect">
             <a:avLst/>
@@ -3331,11 +3421,51 @@
           <a:p>
             <a:pPr algn="l">
               <a:lnSpc>
-                <a:spcPts val="986"/>
+                <a:spcPts val="696"/>
               </a:lnSpc>
             </a:pPr>
             <a:r>
-              <a:rPr sz="680" b="0">
+              <a:rPr sz="480" b="1" spc="140">
+                <a:solidFill>
+                  <a:srgbClr val="6C233A"/>
+                </a:solidFill>
+                <a:latin typeface="맑은 고딕"/>
+                <a:ea typeface="맑은 고딕"/>
+              </a:rPr>
+              <a:t>MAIL</a:t>
+            </a:r>
+          </a:p>
+        </p:txBody>
+      </p:sp>
+      <p:sp>
+        <p:nvSpPr>
+          <p:cNvPr id="12" name="텍스트"/>
+          <p:cNvSpPr txBox="1"/>
+          <p:nvPr/>
+        </p:nvSpPr>
+        <p:spPr>
+          <a:xfrm>
+            <a:off x="2318400" y="1166400"/>
+            <a:ext cx="972000" cy="123826"/>
+          </a:xfrm>
+          <a:prstGeom prst="rect">
+            <a:avLst/>
+          </a:prstGeom>
+          <a:noFill/>
+        </p:spPr>
+        <p:txBody>
+          <a:bodyPr wrap="square" lIns="0" rIns="0" tIns="0" bIns="0" anchor="t">
+            <a:spAutoFit/>
+          </a:bodyPr>
+          <a:lstStyle/>
+          <a:p>
+            <a:pPr algn="l">
+              <a:lnSpc>
+                <a:spcPts val="942"/>
+              </a:lnSpc>
+            </a:pPr>
+            <a:r>
+              <a:rPr sz="650" b="0">
                 <a:solidFill>
                   <a:srgbClr val="12151C"/>
                 </a:solidFill>
@@ -3349,14 +3479,14 @@
       </p:sp>
       <p:sp>
         <p:nvSpPr>
-          <p:cNvPr id="9" name="텍스트"/>
+          <p:cNvPr id="13" name="텍스트"/>
           <p:cNvSpPr txBox="1"/>
           <p:nvPr/>
         </p:nvSpPr>
         <p:spPr>
           <a:xfrm>
-            <a:off x="2052000" y="1411200"/>
-            <a:ext cx="972000" cy="129541"/>
+            <a:off x="2016000" y="1321200"/>
+            <a:ext cx="302400" cy="91441"/>
           </a:xfrm>
           <a:prstGeom prst="rect">
             <a:avLst/>
@@ -3371,11 +3501,51 @@
           <a:p>
             <a:pPr algn="l">
               <a:lnSpc>
-                <a:spcPts val="986"/>
+                <a:spcPts val="696"/>
               </a:lnSpc>
             </a:pPr>
             <a:r>
-              <a:rPr sz="680" b="0">
+              <a:rPr sz="480" b="1" spc="140">
+                <a:solidFill>
+                  <a:srgbClr val="6C233A"/>
+                </a:solidFill>
+                <a:latin typeface="맑은 고딕"/>
+                <a:ea typeface="맑은 고딕"/>
+              </a:rPr>
+              <a:t>ADDR</a:t>
+            </a:r>
+          </a:p>
+        </p:txBody>
+      </p:sp>
+      <p:sp>
+        <p:nvSpPr>
+          <p:cNvPr id="14" name="텍스트"/>
+          <p:cNvSpPr txBox="1"/>
+          <p:nvPr/>
+        </p:nvSpPr>
+        <p:spPr>
+          <a:xfrm>
+            <a:off x="2318400" y="1310400"/>
+            <a:ext cx="972000" cy="123826"/>
+          </a:xfrm>
+          <a:prstGeom prst="rect">
+            <a:avLst/>
+          </a:prstGeom>
+          <a:noFill/>
+        </p:spPr>
+        <p:txBody>
+          <a:bodyPr wrap="square" lIns="0" rIns="0" tIns="0" bIns="0" anchor="t">
+            <a:spAutoFit/>
+          </a:bodyPr>
+          <a:lstStyle/>
+          <a:p>
+            <a:pPr algn="l">
+              <a:lnSpc>
+                <a:spcPts val="942"/>
+              </a:lnSpc>
+            </a:pPr>
+            <a:r>
+              <a:rPr sz="650" b="0">
                 <a:solidFill>
                   <a:srgbClr val="12151C"/>
                 </a:solidFill>
@@ -3383,126 +3553,6 @@
                 <a:ea typeface="맑은 고딕"/>
               </a:rPr>
               <a:t>주소를 입력해 주세요</a:t>
-            </a:r>
-          </a:p>
-        </p:txBody>
-      </p:sp>
-      <p:sp>
-        <p:nvSpPr>
-          <p:cNvPr id="10" name="텍스트"/>
-          <p:cNvSpPr txBox="1"/>
-          <p:nvPr/>
-        </p:nvSpPr>
-        <p:spPr>
-          <a:xfrm>
-            <a:off x="252000" y="1526400"/>
-            <a:ext cx="216000" cy="95251"/>
-          </a:xfrm>
-          <a:prstGeom prst="rect">
-            <a:avLst/>
-          </a:prstGeom>
-          <a:noFill/>
-        </p:spPr>
-        <p:txBody>
-          <a:bodyPr wrap="square" lIns="0" rIns="0" tIns="0" bIns="0" anchor="t">
-            <a:spAutoFit/>
-          </a:bodyPr>
-          <a:lstStyle/>
-          <a:p>
-            <a:pPr algn="l">
-              <a:lnSpc>
-                <a:spcPts val="725"/>
-              </a:lnSpc>
-            </a:pPr>
-            <a:r>
-              <a:rPr sz="500" b="1" spc="120">
-                <a:solidFill>
-                  <a:srgbClr val="6C233A"/>
-                </a:solidFill>
-                <a:latin typeface="맑은 고딕"/>
-                <a:ea typeface="맑은 고딕"/>
-              </a:rPr>
-              <a:t>TEL</a:t>
-            </a:r>
-          </a:p>
-        </p:txBody>
-      </p:sp>
-      <p:sp>
-        <p:nvSpPr>
-          <p:cNvPr id="11" name="텍스트"/>
-          <p:cNvSpPr txBox="1"/>
-          <p:nvPr/>
-        </p:nvSpPr>
-        <p:spPr>
-          <a:xfrm>
-            <a:off x="1080000" y="1526400"/>
-            <a:ext cx="216000" cy="95251"/>
-          </a:xfrm>
-          <a:prstGeom prst="rect">
-            <a:avLst/>
-          </a:prstGeom>
-          <a:noFill/>
-        </p:spPr>
-        <p:txBody>
-          <a:bodyPr wrap="square" lIns="0" rIns="0" tIns="0" bIns="0" anchor="t">
-            <a:spAutoFit/>
-          </a:bodyPr>
-          <a:lstStyle/>
-          <a:p>
-            <a:pPr algn="l">
-              <a:lnSpc>
-                <a:spcPts val="725"/>
-              </a:lnSpc>
-            </a:pPr>
-            <a:r>
-              <a:rPr sz="500" b="1" spc="120">
-                <a:solidFill>
-                  <a:srgbClr val="6C233A"/>
-                </a:solidFill>
-                <a:latin typeface="맑은 고딕"/>
-                <a:ea typeface="맑은 고딕"/>
-              </a:rPr>
-              <a:t>MAIL</a:t>
-            </a:r>
-          </a:p>
-        </p:txBody>
-      </p:sp>
-      <p:sp>
-        <p:nvSpPr>
-          <p:cNvPr id="12" name="텍스트"/>
-          <p:cNvSpPr txBox="1"/>
-          <p:nvPr/>
-        </p:nvSpPr>
-        <p:spPr>
-          <a:xfrm>
-            <a:off x="2052000" y="1526400"/>
-            <a:ext cx="216000" cy="95251"/>
-          </a:xfrm>
-          <a:prstGeom prst="rect">
-            <a:avLst/>
-          </a:prstGeom>
-          <a:noFill/>
-        </p:spPr>
-        <p:txBody>
-          <a:bodyPr wrap="square" lIns="0" rIns="0" tIns="0" bIns="0" anchor="t">
-            <a:spAutoFit/>
-          </a:bodyPr>
-          <a:lstStyle/>
-          <a:p>
-            <a:pPr algn="l">
-              <a:lnSpc>
-                <a:spcPts val="725"/>
-              </a:lnSpc>
-            </a:pPr>
-            <a:r>
-              <a:rPr sz="500" b="1" spc="120">
-                <a:solidFill>
-                  <a:srgbClr val="6C233A"/>
-                </a:solidFill>
-                <a:latin typeface="맑은 고딕"/>
-                <a:ea typeface="맑은 고딕"/>
-              </a:rPr>
-              <a:t>ADDR</a:t>
             </a:r>
           </a:p>
         </p:txBody>
@@ -3535,43 +3585,14 @@
       <p:grpSpPr/>
       <p:sp>
         <p:nvSpPr>
-          <p:cNvPr id="2" name="Rectangle 1"/>
-          <p:cNvSpPr/>
-          <p:nvPr/>
-        </p:nvSpPr>
-        <p:spPr>
-          <a:xfrm>
-            <a:off x="252000" y="540000"/>
-            <a:ext cx="28800" cy="720000"/>
-          </a:xfrm>
-          <a:prstGeom prst="rect">
-            <a:avLst/>
-          </a:prstGeom>
-          <a:solidFill>
-            <a:srgbClr val="FF3B6B"/>
-          </a:solidFill>
-          <a:ln>
-            <a:noFill/>
-          </a:ln>
-        </p:spPr>
-        <p:txBody>
-          <a:bodyPr rtlCol="0" anchor="ctr"/>
-          <a:lstStyle/>
-          <a:p>
-            <a:pPr algn="ctr"/>
-          </a:p>
-        </p:txBody>
-      </p:sp>
-      <p:sp>
-        <p:nvSpPr>
-          <p:cNvPr id="3" name="텍스트"/>
+          <p:cNvPr id="2" name="텍스트"/>
           <p:cNvSpPr txBox="1"/>
           <p:nvPr/>
         </p:nvSpPr>
         <p:spPr>
           <a:xfrm>
-            <a:off x="424800" y="612000"/>
-            <a:ext cx="2160000" cy="648000"/>
+            <a:off x="252000" y="223200"/>
+            <a:ext cx="1080000" cy="99061"/>
           </a:xfrm>
           <a:prstGeom prst="rect">
             <a:avLst/>
@@ -3586,49 +3607,255 @@
           <a:p>
             <a:pPr algn="l">
               <a:lnSpc>
-                <a:spcPts val="1812"/>
+                <a:spcPts val="754"/>
               </a:lnSpc>
             </a:pPr>
             <a:r>
-              <a:rPr sz="1250" b="1">
+              <a:rPr sz="520" b="1" spc="240">
+                <a:solidFill>
+                  <a:srgbClr val="A3A9B5"/>
+                </a:solidFill>
+                <a:latin typeface="맑은 고딕"/>
+                <a:ea typeface="맑은 고딕"/>
+              </a:rPr>
+              <a:t>작업 분야</a:t>
+            </a:r>
+          </a:p>
+        </p:txBody>
+      </p:sp>
+      <p:cxnSp>
+        <p:nvCxnSpPr>
+          <p:cNvPr id="3" name="Connector 2"/>
+          <p:cNvCxnSpPr/>
+          <p:nvPr/>
+        </p:nvCxnSpPr>
+        <p:spPr>
+          <a:xfrm>
+            <a:off x="252000" y="388800"/>
+            <a:ext cx="2736000" cy="0"/>
+          </a:xfrm>
+          <a:prstGeom prst="line">
+            <a:avLst/>
+          </a:prstGeom>
+          <a:ln w="3600">
+            <a:solidFill>
+              <a:srgbClr val="2A2F38"/>
+            </a:solidFill>
+          </a:ln>
+        </p:spPr>
+      </p:cxnSp>
+      <p:sp>
+        <p:nvSpPr>
+          <p:cNvPr id="4" name="텍스트"/>
+          <p:cNvSpPr txBox="1"/>
+          <p:nvPr/>
+        </p:nvSpPr>
+        <p:spPr>
+          <a:xfrm>
+            <a:off x="252000" y="468000"/>
+            <a:ext cx="216000" cy="99061"/>
+          </a:xfrm>
+          <a:prstGeom prst="rect">
+            <a:avLst/>
+          </a:prstGeom>
+          <a:noFill/>
+        </p:spPr>
+        <p:txBody>
+          <a:bodyPr wrap="square" lIns="0" rIns="0" tIns="0" bIns="0" anchor="t">
+            <a:spAutoFit/>
+          </a:bodyPr>
+          <a:lstStyle/>
+          <a:p>
+            <a:pPr algn="l">
+              <a:lnSpc>
+                <a:spcPts val="754"/>
+              </a:lnSpc>
+            </a:pPr>
+            <a:r>
+              <a:rPr sz="520" b="1" spc="100">
+                <a:solidFill>
+                  <a:srgbClr val="FF3B6B"/>
+                </a:solidFill>
+                <a:latin typeface="맑은 고딕"/>
+                <a:ea typeface="맑은 고딕"/>
+              </a:rPr>
+              <a:t>01</a:t>
+            </a:r>
+          </a:p>
+        </p:txBody>
+      </p:sp>
+      <p:sp>
+        <p:nvSpPr>
+          <p:cNvPr id="5" name="텍스트"/>
+          <p:cNvSpPr txBox="1"/>
+          <p:nvPr/>
+        </p:nvSpPr>
+        <p:spPr>
+          <a:xfrm>
+            <a:off x="475200" y="457200"/>
+            <a:ext cx="1152000" cy="140971"/>
+          </a:xfrm>
+          <a:prstGeom prst="rect">
+            <a:avLst/>
+          </a:prstGeom>
+          <a:noFill/>
+        </p:spPr>
+        <p:txBody>
+          <a:bodyPr wrap="square" lIns="0" rIns="0" tIns="0" bIns="0" anchor="t">
+            <a:spAutoFit/>
+          </a:bodyPr>
+          <a:lstStyle/>
+          <a:p>
+            <a:pPr algn="l">
+              <a:lnSpc>
+                <a:spcPts val="1073"/>
+              </a:lnSpc>
+            </a:pPr>
+            <a:r>
+              <a:rPr sz="740" b="0">
                 <a:solidFill>
                   <a:srgbClr val="FFFFFF"/>
                 </a:solidFill>
                 <a:latin typeface="맑은 고딕"/>
                 <a:ea typeface="맑은 고딕"/>
               </a:rPr>
-              <a:t>당신의 이야기를</a:t>
-            </a:r>
-          </a:p>
+              <a:t>편집 디자인</a:t>
+            </a:r>
+          </a:p>
+        </p:txBody>
+      </p:sp>
+      <p:cxnSp>
+        <p:nvCxnSpPr>
+          <p:cNvPr id="6" name="Connector 5"/>
+          <p:cNvCxnSpPr/>
+          <p:nvPr/>
+        </p:nvCxnSpPr>
+        <p:spPr>
+          <a:xfrm>
+            <a:off x="252000" y="691200"/>
+            <a:ext cx="1296000" cy="0"/>
+          </a:xfrm>
+          <a:prstGeom prst="line">
+            <a:avLst/>
+          </a:prstGeom>
+          <a:ln w="3600">
+            <a:solidFill>
+              <a:srgbClr val="2A2F38"/>
+            </a:solidFill>
+          </a:ln>
+        </p:spPr>
+      </p:cxnSp>
+      <p:sp>
+        <p:nvSpPr>
+          <p:cNvPr id="7" name="텍스트"/>
+          <p:cNvSpPr txBox="1"/>
+          <p:nvPr/>
+        </p:nvSpPr>
+        <p:spPr>
+          <a:xfrm>
+            <a:off x="1656000" y="468000"/>
+            <a:ext cx="216000" cy="99061"/>
+          </a:xfrm>
+          <a:prstGeom prst="rect">
+            <a:avLst/>
+          </a:prstGeom>
+          <a:noFill/>
+        </p:spPr>
+        <p:txBody>
+          <a:bodyPr wrap="square" lIns="0" rIns="0" tIns="0" bIns="0" anchor="t">
+            <a:spAutoFit/>
+          </a:bodyPr>
+          <a:lstStyle/>
           <a:p>
             <a:pPr algn="l">
               <a:lnSpc>
-                <a:spcPts val="1812"/>
+                <a:spcPts val="754"/>
               </a:lnSpc>
             </a:pPr>
             <a:r>
-              <a:rPr sz="1250" b="1">
+              <a:rPr sz="520" b="1" spc="100">
+                <a:solidFill>
+                  <a:srgbClr val="FF3B6B"/>
+                </a:solidFill>
+                <a:latin typeface="맑은 고딕"/>
+                <a:ea typeface="맑은 고딕"/>
+              </a:rPr>
+              <a:t>02</a:t>
+            </a:r>
+          </a:p>
+        </p:txBody>
+      </p:sp>
+      <p:sp>
+        <p:nvSpPr>
+          <p:cNvPr id="8" name="텍스트"/>
+          <p:cNvSpPr txBox="1"/>
+          <p:nvPr/>
+        </p:nvSpPr>
+        <p:spPr>
+          <a:xfrm>
+            <a:off x="1879200" y="457200"/>
+            <a:ext cx="1152000" cy="140971"/>
+          </a:xfrm>
+          <a:prstGeom prst="rect">
+            <a:avLst/>
+          </a:prstGeom>
+          <a:noFill/>
+        </p:spPr>
+        <p:txBody>
+          <a:bodyPr wrap="square" lIns="0" rIns="0" tIns="0" bIns="0" anchor="t">
+            <a:spAutoFit/>
+          </a:bodyPr>
+          <a:lstStyle/>
+          <a:p>
+            <a:pPr algn="l">
+              <a:lnSpc>
+                <a:spcPts val="1073"/>
+              </a:lnSpc>
+            </a:pPr>
+            <a:r>
+              <a:rPr sz="740" b="0">
                 <a:solidFill>
                   <a:srgbClr val="FFFFFF"/>
                 </a:solidFill>
                 <a:latin typeface="맑은 고딕"/>
                 <a:ea typeface="맑은 고딕"/>
               </a:rPr>
-              <a:t>장면으로 옮깁니다</a:t>
-            </a:r>
-          </a:p>
-        </p:txBody>
-      </p:sp>
-      <p:sp>
-        <p:nvSpPr>
-          <p:cNvPr id="4" name="텍스트"/>
+              <a:t>모션 그래픽</a:t>
+            </a:r>
+          </a:p>
+        </p:txBody>
+      </p:sp>
+      <p:cxnSp>
+        <p:nvCxnSpPr>
+          <p:cNvPr id="9" name="Connector 8"/>
+          <p:cNvCxnSpPr/>
+          <p:nvPr/>
+        </p:nvCxnSpPr>
+        <p:spPr>
+          <a:xfrm>
+            <a:off x="1656000" y="691200"/>
+            <a:ext cx="1296000" cy="0"/>
+          </a:xfrm>
+          <a:prstGeom prst="line">
+            <a:avLst/>
+          </a:prstGeom>
+          <a:ln w="3600">
+            <a:solidFill>
+              <a:srgbClr val="2A2F38"/>
+            </a:solidFill>
+          </a:ln>
+        </p:spPr>
+      </p:cxnSp>
+      <p:sp>
+        <p:nvSpPr>
+          <p:cNvPr id="10" name="텍스트"/>
           <p:cNvSpPr txBox="1"/>
           <p:nvPr/>
         </p:nvSpPr>
         <p:spPr>
           <a:xfrm>
-            <a:off x="424800" y="1512000"/>
-            <a:ext cx="1800000" cy="123826"/>
+            <a:off x="252000" y="813600"/>
+            <a:ext cx="216000" cy="99061"/>
           </a:xfrm>
           <a:prstGeom prst="rect">
             <a:avLst/>
@@ -3643,18 +3870,260 @@
           <a:p>
             <a:pPr algn="l">
               <a:lnSpc>
-                <a:spcPts val="942"/>
+                <a:spcPts val="754"/>
               </a:lnSpc>
             </a:pPr>
             <a:r>
-              <a:rPr sz="650" b="1" spc="200">
+              <a:rPr sz="520" b="1" spc="100">
+                <a:solidFill>
+                  <a:srgbClr val="FF3B6B"/>
+                </a:solidFill>
+                <a:latin typeface="맑은 고딕"/>
+                <a:ea typeface="맑은 고딕"/>
+              </a:rPr>
+              <a:t>03</a:t>
+            </a:r>
+          </a:p>
+        </p:txBody>
+      </p:sp>
+      <p:sp>
+        <p:nvSpPr>
+          <p:cNvPr id="11" name="텍스트"/>
+          <p:cNvSpPr txBox="1"/>
+          <p:nvPr/>
+        </p:nvSpPr>
+        <p:spPr>
+          <a:xfrm>
+            <a:off x="475200" y="802800"/>
+            <a:ext cx="1152000" cy="140971"/>
+          </a:xfrm>
+          <a:prstGeom prst="rect">
+            <a:avLst/>
+          </a:prstGeom>
+          <a:noFill/>
+        </p:spPr>
+        <p:txBody>
+          <a:bodyPr wrap="square" lIns="0" rIns="0" tIns="0" bIns="0" anchor="t">
+            <a:spAutoFit/>
+          </a:bodyPr>
+          <a:lstStyle/>
+          <a:p>
+            <a:pPr algn="l">
+              <a:lnSpc>
+                <a:spcPts val="1073"/>
+              </a:lnSpc>
+            </a:pPr>
+            <a:r>
+              <a:rPr sz="740" b="0">
+                <a:solidFill>
+                  <a:srgbClr val="FFFFFF"/>
+                </a:solidFill>
+                <a:latin typeface="맑은 고딕"/>
+                <a:ea typeface="맑은 고딕"/>
+              </a:rPr>
+              <a:t>인물 촬영</a:t>
+            </a:r>
+          </a:p>
+        </p:txBody>
+      </p:sp>
+      <p:cxnSp>
+        <p:nvCxnSpPr>
+          <p:cNvPr id="12" name="Connector 11"/>
+          <p:cNvCxnSpPr/>
+          <p:nvPr/>
+        </p:nvCxnSpPr>
+        <p:spPr>
+          <a:xfrm>
+            <a:off x="252000" y="1036800"/>
+            <a:ext cx="1296000" cy="0"/>
+          </a:xfrm>
+          <a:prstGeom prst="line">
+            <a:avLst/>
+          </a:prstGeom>
+          <a:ln w="3600">
+            <a:solidFill>
+              <a:srgbClr val="2A2F38"/>
+            </a:solidFill>
+          </a:ln>
+        </p:spPr>
+      </p:cxnSp>
+      <p:sp>
+        <p:nvSpPr>
+          <p:cNvPr id="13" name="텍스트"/>
+          <p:cNvSpPr txBox="1"/>
+          <p:nvPr/>
+        </p:nvSpPr>
+        <p:spPr>
+          <a:xfrm>
+            <a:off x="1656000" y="813600"/>
+            <a:ext cx="216000" cy="99061"/>
+          </a:xfrm>
+          <a:prstGeom prst="rect">
+            <a:avLst/>
+          </a:prstGeom>
+          <a:noFill/>
+        </p:spPr>
+        <p:txBody>
+          <a:bodyPr wrap="square" lIns="0" rIns="0" tIns="0" bIns="0" anchor="t">
+            <a:spAutoFit/>
+          </a:bodyPr>
+          <a:lstStyle/>
+          <a:p>
+            <a:pPr algn="l">
+              <a:lnSpc>
+                <a:spcPts val="754"/>
+              </a:lnSpc>
+            </a:pPr>
+            <a:r>
+              <a:rPr sz="520" b="1" spc="100">
+                <a:solidFill>
+                  <a:srgbClr val="FF3B6B"/>
+                </a:solidFill>
+                <a:latin typeface="맑은 고딕"/>
+                <a:ea typeface="맑은 고딕"/>
+              </a:rPr>
+              <a:t>04</a:t>
+            </a:r>
+          </a:p>
+        </p:txBody>
+      </p:sp>
+      <p:sp>
+        <p:nvSpPr>
+          <p:cNvPr id="14" name="텍스트"/>
+          <p:cNvSpPr txBox="1"/>
+          <p:nvPr/>
+        </p:nvSpPr>
+        <p:spPr>
+          <a:xfrm>
+            <a:off x="1879200" y="802800"/>
+            <a:ext cx="1152000" cy="140971"/>
+          </a:xfrm>
+          <a:prstGeom prst="rect">
+            <a:avLst/>
+          </a:prstGeom>
+          <a:noFill/>
+        </p:spPr>
+        <p:txBody>
+          <a:bodyPr wrap="square" lIns="0" rIns="0" tIns="0" bIns="0" anchor="t">
+            <a:spAutoFit/>
+          </a:bodyPr>
+          <a:lstStyle/>
+          <a:p>
+            <a:pPr algn="l">
+              <a:lnSpc>
+                <a:spcPts val="1073"/>
+              </a:lnSpc>
+            </a:pPr>
+            <a:r>
+              <a:rPr sz="740" b="0">
+                <a:solidFill>
+                  <a:srgbClr val="FFFFFF"/>
+                </a:solidFill>
+                <a:latin typeface="맑은 고딕"/>
+                <a:ea typeface="맑은 고딕"/>
+              </a:rPr>
+              <a:t>외주 문의</a:t>
+            </a:r>
+          </a:p>
+        </p:txBody>
+      </p:sp>
+      <p:cxnSp>
+        <p:nvCxnSpPr>
+          <p:cNvPr id="15" name="Connector 14"/>
+          <p:cNvCxnSpPr/>
+          <p:nvPr/>
+        </p:nvCxnSpPr>
+        <p:spPr>
+          <a:xfrm>
+            <a:off x="1656000" y="1036800"/>
+            <a:ext cx="1296000" cy="0"/>
+          </a:xfrm>
+          <a:prstGeom prst="line">
+            <a:avLst/>
+          </a:prstGeom>
+          <a:ln w="3600">
+            <a:solidFill>
+              <a:srgbClr val="2A2F38"/>
+            </a:solidFill>
+          </a:ln>
+        </p:spPr>
+      </p:cxnSp>
+      <p:sp>
+        <p:nvSpPr>
+          <p:cNvPr id="16" name="텍스트"/>
+          <p:cNvSpPr txBox="1"/>
+          <p:nvPr/>
+        </p:nvSpPr>
+        <p:spPr>
+          <a:xfrm>
+            <a:off x="252000" y="1569600"/>
+            <a:ext cx="1368000" cy="114301"/>
+          </a:xfrm>
+          <a:prstGeom prst="rect">
+            <a:avLst/>
+          </a:prstGeom>
+          <a:noFill/>
+        </p:spPr>
+        <p:txBody>
+          <a:bodyPr wrap="square" lIns="0" rIns="0" tIns="0" bIns="0" anchor="t">
+            <a:spAutoFit/>
+          </a:bodyPr>
+          <a:lstStyle/>
+          <a:p>
+            <a:pPr algn="l">
+              <a:lnSpc>
+                <a:spcPts val="869"/>
+              </a:lnSpc>
+            </a:pPr>
+            <a:r>
+              <a:rPr sz="600" b="0">
                 <a:solidFill>
                   <a:srgbClr val="A3A9B5"/>
                 </a:solidFill>
                 <a:latin typeface="맑은 고딕"/>
                 <a:ea typeface="맑은 고딕"/>
               </a:rPr>
-              <a:t>스튜디오 이름</a:t>
+              <a:t>평일 10:00 – 19:00</a:t>
+            </a:r>
+          </a:p>
+        </p:txBody>
+      </p:sp>
+      <p:sp>
+        <p:nvSpPr>
+          <p:cNvPr id="17" name="텍스트"/>
+          <p:cNvSpPr txBox="1"/>
+          <p:nvPr/>
+        </p:nvSpPr>
+        <p:spPr>
+          <a:xfrm>
+            <a:off x="1620000" y="1569600"/>
+            <a:ext cx="1368000" cy="114301"/>
+          </a:xfrm>
+          <a:prstGeom prst="rect">
+            <a:avLst/>
+          </a:prstGeom>
+          <a:noFill/>
+        </p:spPr>
+        <p:txBody>
+          <a:bodyPr wrap="square" lIns="0" rIns="0" tIns="0" bIns="0" anchor="t">
+            <a:spAutoFit/>
+          </a:bodyPr>
+          <a:lstStyle/>
+          <a:p>
+            <a:pPr algn="r">
+              <a:lnSpc>
+                <a:spcPts val="869"/>
+              </a:lnSpc>
+            </a:pPr>
+            <a:r>
+              <a:rPr sz="600" b="0">
+                <a:solidFill>
+                  <a:srgbClr val="A3A9B5"/>
+                </a:solidFill>
+                <a:latin typeface="맑은 고딕"/>
+                <a:ea typeface="맑은 고딕"/>
+              </a:rPr>
+              <a:t>www.example.com</a:t>
             </a:r>
           </a:p>
         </p:txBody>
